--- a/cours/Dialogues_Anglais/Presentations_PPTX/Niveau 1/Dialogue_21_At_School.pptx
+++ b/cours/Dialogues_Anglais/Presentations_PPTX/Niveau 1/Dialogue_21_At_School.pptx
@@ -2845,7 +2845,7 @@
           <a:solidFill>
             <a:schemeClr val="tx1"/>
           </a:solidFill>
-          <a:latin typeface="+mj-lt"/>
+          <a:latin typeface="Poppins"/>
           <a:ea typeface="+mj-ea"/>
           <a:cs typeface="+mj-cs"/>
         </a:defRPr>
@@ -2862,7 +2862,7 @@
           <a:solidFill>
             <a:schemeClr val="tx1"/>
           </a:solidFill>
-          <a:latin typeface="+mn-lt"/>
+          <a:latin typeface="Poppins"/>
           <a:ea typeface="+mn-ea"/>
           <a:cs typeface="+mn-cs"/>
         </a:defRPr>
@@ -2877,7 +2877,7 @@
           <a:solidFill>
             <a:schemeClr val="tx1"/>
           </a:solidFill>
-          <a:latin typeface="+mn-lt"/>
+          <a:latin typeface="Poppins"/>
           <a:ea typeface="+mn-ea"/>
           <a:cs typeface="+mn-cs"/>
         </a:defRPr>
@@ -2892,7 +2892,7 @@
           <a:solidFill>
             <a:schemeClr val="tx1"/>
           </a:solidFill>
-          <a:latin typeface="+mn-lt"/>
+          <a:latin typeface="Poppins"/>
           <a:ea typeface="+mn-ea"/>
           <a:cs typeface="+mn-cs"/>
         </a:defRPr>
@@ -2907,7 +2907,7 @@
           <a:solidFill>
             <a:schemeClr val="tx1"/>
           </a:solidFill>
-          <a:latin typeface="+mn-lt"/>
+          <a:latin typeface="Poppins"/>
           <a:ea typeface="+mn-ea"/>
           <a:cs typeface="+mn-cs"/>
         </a:defRPr>
@@ -2922,7 +2922,7 @@
           <a:solidFill>
             <a:schemeClr val="tx1"/>
           </a:solidFill>
-          <a:latin typeface="+mn-lt"/>
+          <a:latin typeface="Poppins"/>
           <a:ea typeface="+mn-ea"/>
           <a:cs typeface="+mn-cs"/>
         </a:defRPr>
@@ -2937,7 +2937,7 @@
           <a:solidFill>
             <a:schemeClr val="tx1"/>
           </a:solidFill>
-          <a:latin typeface="+mn-lt"/>
+          <a:latin typeface="Poppins"/>
           <a:ea typeface="+mn-ea"/>
           <a:cs typeface="+mn-cs"/>
         </a:defRPr>
@@ -2952,7 +2952,7 @@
           <a:solidFill>
             <a:schemeClr val="tx1"/>
           </a:solidFill>
-          <a:latin typeface="+mn-lt"/>
+          <a:latin typeface="Poppins"/>
           <a:ea typeface="+mn-ea"/>
           <a:cs typeface="+mn-cs"/>
         </a:defRPr>
@@ -2967,7 +2967,7 @@
           <a:solidFill>
             <a:schemeClr val="tx1"/>
           </a:solidFill>
-          <a:latin typeface="+mn-lt"/>
+          <a:latin typeface="Poppins"/>
           <a:ea typeface="+mn-ea"/>
           <a:cs typeface="+mn-cs"/>
         </a:defRPr>
@@ -2982,7 +2982,7 @@
           <a:solidFill>
             <a:schemeClr val="tx1"/>
           </a:solidFill>
-          <a:latin typeface="+mn-lt"/>
+          <a:latin typeface="Poppins"/>
           <a:ea typeface="+mn-ea"/>
           <a:cs typeface="+mn-cs"/>
         </a:defRPr>
@@ -2997,7 +2997,7 @@
           <a:solidFill>
             <a:schemeClr val="tx1"/>
           </a:solidFill>
-          <a:latin typeface="+mn-lt"/>
+          <a:latin typeface="Poppins"/>
           <a:ea typeface="+mn-ea"/>
           <a:cs typeface="+mn-cs"/>
         </a:defRPr>
@@ -3007,7 +3007,7 @@
           <a:solidFill>
             <a:schemeClr val="tx1"/>
           </a:solidFill>
-          <a:latin typeface="+mn-lt"/>
+          <a:latin typeface="Poppins"/>
           <a:ea typeface="+mn-ea"/>
           <a:cs typeface="+mn-cs"/>
         </a:defRPr>
@@ -3017,7 +3017,7 @@
           <a:solidFill>
             <a:schemeClr val="tx1"/>
           </a:solidFill>
-          <a:latin typeface="+mn-lt"/>
+          <a:latin typeface="Poppins"/>
           <a:ea typeface="+mn-ea"/>
           <a:cs typeface="+mn-cs"/>
         </a:defRPr>
@@ -3027,7 +3027,7 @@
           <a:solidFill>
             <a:schemeClr val="tx1"/>
           </a:solidFill>
-          <a:latin typeface="+mn-lt"/>
+          <a:latin typeface="Poppins"/>
           <a:ea typeface="+mn-ea"/>
           <a:cs typeface="+mn-cs"/>
         </a:defRPr>
@@ -3037,7 +3037,7 @@
           <a:solidFill>
             <a:schemeClr val="tx1"/>
           </a:solidFill>
-          <a:latin typeface="+mn-lt"/>
+          <a:latin typeface="Poppins"/>
           <a:ea typeface="+mn-ea"/>
           <a:cs typeface="+mn-cs"/>
         </a:defRPr>
@@ -3047,7 +3047,7 @@
           <a:solidFill>
             <a:schemeClr val="tx1"/>
           </a:solidFill>
-          <a:latin typeface="+mn-lt"/>
+          <a:latin typeface="Poppins"/>
           <a:ea typeface="+mn-ea"/>
           <a:cs typeface="+mn-cs"/>
         </a:defRPr>
@@ -3057,7 +3057,7 @@
           <a:solidFill>
             <a:schemeClr val="tx1"/>
           </a:solidFill>
-          <a:latin typeface="+mn-lt"/>
+          <a:latin typeface="Poppins"/>
           <a:ea typeface="+mn-ea"/>
           <a:cs typeface="+mn-cs"/>
         </a:defRPr>
@@ -3067,7 +3067,7 @@
           <a:solidFill>
             <a:schemeClr val="tx1"/>
           </a:solidFill>
-          <a:latin typeface="+mn-lt"/>
+          <a:latin typeface="Poppins"/>
           <a:ea typeface="+mn-ea"/>
           <a:cs typeface="+mn-cs"/>
         </a:defRPr>
@@ -3077,7 +3077,7 @@
           <a:solidFill>
             <a:schemeClr val="tx1"/>
           </a:solidFill>
-          <a:latin typeface="+mn-lt"/>
+          <a:latin typeface="Poppins"/>
           <a:ea typeface="+mn-ea"/>
           <a:cs typeface="+mn-cs"/>
         </a:defRPr>
@@ -3092,9 +3092,7 @@
   <p:cSld>
     <p:bg>
       <p:bgPr>
-        <a:solidFill>
-          <a:srgbClr val="1A5C33"/>
-        </a:solidFill>
+        <a:solidFill>val="006847"/&gt;</a:solidFill>
         <a:effectLst/>
       </p:bgPr>
     </p:bg>
@@ -3129,10 +3127,8 @@
           <a:p>
             <a:pPr algn="ctr">
               <a:defRPr sz="3200" b="1">
-                <a:solidFill>
-                  <a:srgbClr val="FFFFFF"/>
-                </a:solidFill>
-                <a:latin typeface="Calibri"/>
+                <a:solidFill>val="FFFFFF"/&gt;</a:solidFill>
+                <a:latin typeface="Poppins"/>
               </a:defRPr>
             </a:pPr>
             <a:r>
@@ -3165,10 +3161,8 @@
           <a:p>
             <a:pPr algn="ctr">
               <a:defRPr sz="2000" b="0">
-                <a:solidFill>
-                  <a:srgbClr val="C5D9C7"/>
-                </a:solidFill>
-                <a:latin typeface="Calibri"/>
+                <a:solidFill>val="DFE5EA"/&gt;</a:solidFill>
+                <a:latin typeface="Poppins"/>
               </a:defRPr>
             </a:pPr>
             <a:r>
@@ -3201,10 +3195,8 @@
           <a:p>
             <a:pPr algn="ctr">
               <a:defRPr sz="1400" b="0">
-                <a:solidFill>
-                  <a:srgbClr val="A0C0A8"/>
-                </a:solidFill>
-                <a:latin typeface="Calibri"/>
+                <a:solidFill>val="B7C9BE"/&gt;</a:solidFill>
+                <a:latin typeface="Poppins"/>
               </a:defRPr>
             </a:pPr>
             <a:r>
@@ -3237,14 +3229,53 @@
           <a:p>
             <a:pPr algn="ctr">
               <a:defRPr sz="1200" b="0">
+                <a:solidFill>val="93B39E"/&gt;</a:solidFill>
+                <a:latin typeface="Poppins"/>
+              </a:defRPr>
+            </a:pPr>
+            <a:r>
+              <a:t>Dialogue 21 / 23</a:t>
+            </a:r>
+          </a:p>
+        </p:txBody>
+      </p:sp>
+      <p:sp>
+        <p:nvSpPr>
+          <p:cNvPr id="990001" name="Pied de page FLE"/>
+          <p:cNvSpPr>
+            <a:spLocks noGrp="1"/>
+          </p:cNvSpPr>
+          <p:nvPr/>
+        </p:nvSpPr>
+        <p:spPr>
+          <a:xfrm>
+            <a:off x="2880360" y="640080"/>
+            <a:ext cx="4572000" cy="274320"/>
+          </a:xfrm>
+          <a:prstGeom prst="rect">
+            <a:avLst/>
+          </a:prstGeom>
+        </p:spPr>
+        <p:txBody>
+          <a:bodyPr anchor="b"/>
+          <a:lstStyle/>
+          <a:p>
+            <a:pPr algn="r">
+              <a:defRPr sz="900">
                 <a:solidFill>
-                  <a:srgbClr val="80B088"/>
+                  <a:srgbClr val="9AA7B6"/>
                 </a:solidFill>
-                <a:latin typeface="Calibri"/>
-              </a:defRPr>
-            </a:pPr>
-            <a:r>
-              <a:t>Dialogue 21 / 23</a:t>
+                <a:latin typeface="Poppins"/>
+              </a:defRPr>
+            </a:pPr>
+            <a:r>
+              <a:rPr lang="fr-FR" sz="900">
+                <a:solidFill>
+                  <a:srgbClr val="9AA7B6"/>
+                </a:solidFill>
+                <a:latin typeface="Poppins"/>
+              </a:rPr>
+              <a:t>Université de Mostaganem — Dr. Madani BELACEL</a:t>
             </a:r>
           </a:p>
         </p:txBody>
@@ -3262,9 +3293,7 @@
   <p:cSld>
     <p:bg>
       <p:bgPr>
-        <a:solidFill>
-          <a:srgbClr val="FFFFFF"/>
-        </a:solidFill>
+        <a:solidFill>val="FFFFFF"/&gt;</a:solidFill>
         <a:effectLst/>
       </p:bgPr>
     </p:bg>
@@ -3289,9 +3318,7 @@
           <a:prstGeom prst="rect">
             <a:avLst/>
           </a:prstGeom>
-          <a:solidFill>
-            <a:srgbClr val="2C6E49"/>
-          </a:solidFill>
+          <a:solidFill>val="00875B"/&gt;</a:solidFill>
           <a:ln>
             <a:noFill/>
           </a:ln>
@@ -3342,10 +3369,8 @@
           <a:p>
             <a:pPr algn="l">
               <a:defRPr sz="1000" b="0">
-                <a:solidFill>
-                  <a:srgbClr val="666666"/>
-                </a:solidFill>
-                <a:latin typeface="Calibri"/>
+                <a:solidFill>val="69788B"/&gt;</a:solidFill>
+                <a:latin typeface="Poppins"/>
               </a:defRPr>
             </a:pPr>
             <a:r>
@@ -3378,10 +3403,8 @@
           <a:p>
             <a:pPr algn="r">
               <a:defRPr sz="1000" b="0">
-                <a:solidFill>
-                  <a:srgbClr val="666666"/>
-                </a:solidFill>
-                <a:latin typeface="Calibri"/>
+                <a:solidFill>val="69788B"/&gt;</a:solidFill>
+                <a:latin typeface="Poppins"/>
               </a:defRPr>
             </a:pPr>
             <a:r>
@@ -3414,10 +3437,8 @@
           <a:p>
             <a:pPr algn="l">
               <a:defRPr sz="2400" b="1">
-                <a:solidFill>
-                  <a:srgbClr val="B45309"/>
-                </a:solidFill>
-                <a:latin typeface="Calibri"/>
+                <a:solidFill>val="F0B429"/&gt;</a:solidFill>
+                <a:latin typeface="Poppins"/>
               </a:defRPr>
             </a:pPr>
             <a:r>
@@ -3450,10 +3471,8 @@
           <a:p>
             <a:pPr algn="l">
               <a:defRPr sz="2200" b="0">
-                <a:solidFill>
-                  <a:srgbClr val="222222"/>
-                </a:solidFill>
-                <a:latin typeface="Calibri"/>
+                <a:solidFill>val="22344A"/&gt;</a:solidFill>
+                <a:latin typeface="Poppins"/>
               </a:defRPr>
             </a:pPr>
             <a:r>
@@ -3476,9 +3495,7 @@
           <a:prstGeom prst="rect">
             <a:avLst/>
           </a:prstGeom>
-          <a:solidFill>
-            <a:srgbClr val="E8F0E9"/>
-          </a:solidFill>
+          <a:solidFill>val="F4F6F8"/&gt;</a:solidFill>
           <a:ln>
             <a:noFill/>
           </a:ln>
@@ -3529,10 +3546,8 @@
           <a:p>
             <a:pPr algn="l">
               <a:defRPr sz="1100" b="1">
-                <a:solidFill>
-                  <a:srgbClr val="2C6E49"/>
-                </a:solidFill>
-                <a:latin typeface="Calibri"/>
+                <a:solidFill>val="00875B"/&gt;</a:solidFill>
+                <a:latin typeface="Poppins"/>
               </a:defRPr>
             </a:pPr>
             <a:r>
@@ -3565,10 +3580,8 @@
           <a:p>
             <a:pPr algn="r">
               <a:defRPr sz="2000" b="0">
-                <a:solidFill>
-                  <a:srgbClr val="1A3C6E"/>
-                </a:solidFill>
-                <a:latin typeface="Traditional Arabic"/>
+                <a:solidFill>val="34495E"/&gt;</a:solidFill>
+                <a:latin typeface="Poppins"/>
               </a:defRPr>
             </a:pPr>
             <a:r>
@@ -3601,10 +3614,8 @@
           <a:p>
             <a:pPr algn="l">
               <a:defRPr sz="900" b="0">
-                <a:solidFill>
-                  <a:srgbClr val="666666"/>
-                </a:solidFill>
-                <a:latin typeface="Calibri"/>
+                <a:solidFill>val="69788B"/&gt;</a:solidFill>
+                <a:latin typeface="Poppins"/>
               </a:defRPr>
             </a:pPr>
             <a:r>
@@ -3627,9 +3638,7 @@
           <a:prstGeom prst="rect">
             <a:avLst/>
           </a:prstGeom>
-          <a:solidFill>
-            <a:srgbClr val="1A5C33"/>
-          </a:solidFill>
+          <a:solidFill>val="006847"/&gt;</a:solidFill>
           <a:ln>
             <a:noFill/>
           </a:ln>
@@ -3653,6 +3662,47 @@
           <a:lstStyle/>
           <a:p>
             <a:pPr algn="ctr"/>
+          </a:p>
+        </p:txBody>
+      </p:sp>
+      <p:sp>
+        <p:nvSpPr>
+          <p:cNvPr id="990001" name="Pied de page FLE"/>
+          <p:cNvSpPr>
+            <a:spLocks noGrp="1"/>
+          </p:cNvSpPr>
+          <p:nvPr/>
+        </p:nvSpPr>
+        <p:spPr>
+          <a:xfrm>
+            <a:off x="4343400" y="-384048"/>
+            <a:ext cx="4572000" cy="274320"/>
+          </a:xfrm>
+          <a:prstGeom prst="rect">
+            <a:avLst/>
+          </a:prstGeom>
+        </p:spPr>
+        <p:txBody>
+          <a:bodyPr anchor="b"/>
+          <a:lstStyle/>
+          <a:p>
+            <a:pPr algn="r">
+              <a:defRPr sz="900">
+                <a:solidFill>
+                  <a:srgbClr val="9AA7B6"/>
+                </a:solidFill>
+                <a:latin typeface="Poppins"/>
+              </a:defRPr>
+            </a:pPr>
+            <a:r>
+              <a:rPr lang="fr-FR" sz="900">
+                <a:solidFill>
+                  <a:srgbClr val="9AA7B6"/>
+                </a:solidFill>
+                <a:latin typeface="Poppins"/>
+              </a:rPr>
+              <a:t>Université de Mostaganem — Dr. Madani BELACEL</a:t>
+            </a:r>
           </a:p>
         </p:txBody>
       </p:sp>
@@ -3669,9 +3719,7 @@
   <p:cSld>
     <p:bg>
       <p:bgPr>
-        <a:solidFill>
-          <a:srgbClr val="FFFFFF"/>
-        </a:solidFill>
+        <a:solidFill>val="FFFFFF"/&gt;</a:solidFill>
         <a:effectLst/>
       </p:bgPr>
     </p:bg>
@@ -3696,9 +3744,7 @@
           <a:prstGeom prst="rect">
             <a:avLst/>
           </a:prstGeom>
-          <a:solidFill>
-            <a:srgbClr val="2C6E49"/>
-          </a:solidFill>
+          <a:solidFill>val="00875B"/&gt;</a:solidFill>
           <a:ln>
             <a:noFill/>
           </a:ln>
@@ -3749,10 +3795,8 @@
           <a:p>
             <a:pPr algn="l">
               <a:defRPr sz="1000" b="0">
-                <a:solidFill>
-                  <a:srgbClr val="666666"/>
-                </a:solidFill>
-                <a:latin typeface="Calibri"/>
+                <a:solidFill>val="69788B"/&gt;</a:solidFill>
+                <a:latin typeface="Poppins"/>
               </a:defRPr>
             </a:pPr>
             <a:r>
@@ -3785,10 +3829,8 @@
           <a:p>
             <a:pPr algn="r">
               <a:defRPr sz="1000" b="0">
-                <a:solidFill>
-                  <a:srgbClr val="666666"/>
-                </a:solidFill>
-                <a:latin typeface="Calibri"/>
+                <a:solidFill>val="69788B"/&gt;</a:solidFill>
+                <a:latin typeface="Poppins"/>
               </a:defRPr>
             </a:pPr>
             <a:r>
@@ -3821,10 +3863,8 @@
           <a:p>
             <a:pPr algn="l">
               <a:defRPr sz="2400" b="1">
-                <a:solidFill>
-                  <a:srgbClr val="B45309"/>
-                </a:solidFill>
-                <a:latin typeface="Calibri"/>
+                <a:solidFill>val="F0B429"/&gt;</a:solidFill>
+                <a:latin typeface="Poppins"/>
               </a:defRPr>
             </a:pPr>
             <a:r>
@@ -3857,10 +3897,8 @@
           <a:p>
             <a:pPr algn="l">
               <a:defRPr sz="2200" b="0">
-                <a:solidFill>
-                  <a:srgbClr val="222222"/>
-                </a:solidFill>
-                <a:latin typeface="Calibri"/>
+                <a:solidFill>val="22344A"/&gt;</a:solidFill>
+                <a:latin typeface="Poppins"/>
               </a:defRPr>
             </a:pPr>
             <a:r>
@@ -3883,9 +3921,7 @@
           <a:prstGeom prst="rect">
             <a:avLst/>
           </a:prstGeom>
-          <a:solidFill>
-            <a:srgbClr val="E8F0E9"/>
-          </a:solidFill>
+          <a:solidFill>val="F4F6F8"/&gt;</a:solidFill>
           <a:ln>
             <a:noFill/>
           </a:ln>
@@ -3936,10 +3972,8 @@
           <a:p>
             <a:pPr algn="l">
               <a:defRPr sz="1100" b="1">
-                <a:solidFill>
-                  <a:srgbClr val="2C6E49"/>
-                </a:solidFill>
-                <a:latin typeface="Calibri"/>
+                <a:solidFill>val="00875B"/&gt;</a:solidFill>
+                <a:latin typeface="Poppins"/>
               </a:defRPr>
             </a:pPr>
             <a:r>
@@ -3972,10 +4006,8 @@
           <a:p>
             <a:pPr algn="r">
               <a:defRPr sz="2000" b="0">
-                <a:solidFill>
-                  <a:srgbClr val="1A3C6E"/>
-                </a:solidFill>
-                <a:latin typeface="Traditional Arabic"/>
+                <a:solidFill>val="34495E"/&gt;</a:solidFill>
+                <a:latin typeface="Poppins"/>
               </a:defRPr>
             </a:pPr>
             <a:r>
@@ -4008,10 +4040,8 @@
           <a:p>
             <a:pPr algn="l">
               <a:defRPr sz="900" b="0">
-                <a:solidFill>
-                  <a:srgbClr val="666666"/>
-                </a:solidFill>
-                <a:latin typeface="Calibri"/>
+                <a:solidFill>val="69788B"/&gt;</a:solidFill>
+                <a:latin typeface="Poppins"/>
               </a:defRPr>
             </a:pPr>
             <a:r>
@@ -4034,9 +4064,7 @@
           <a:prstGeom prst="rect">
             <a:avLst/>
           </a:prstGeom>
-          <a:solidFill>
-            <a:srgbClr val="1A5C33"/>
-          </a:solidFill>
+          <a:solidFill>val="006847"/&gt;</a:solidFill>
           <a:ln>
             <a:noFill/>
           </a:ln>
@@ -4060,6 +4088,47 @@
           <a:lstStyle/>
           <a:p>
             <a:pPr algn="ctr"/>
+          </a:p>
+        </p:txBody>
+      </p:sp>
+      <p:sp>
+        <p:nvSpPr>
+          <p:cNvPr id="990001" name="Pied de page FLE"/>
+          <p:cNvSpPr>
+            <a:spLocks noGrp="1"/>
+          </p:cNvSpPr>
+          <p:nvPr/>
+        </p:nvSpPr>
+        <p:spPr>
+          <a:xfrm>
+            <a:off x="4343400" y="-384048"/>
+            <a:ext cx="4572000" cy="274320"/>
+          </a:xfrm>
+          <a:prstGeom prst="rect">
+            <a:avLst/>
+          </a:prstGeom>
+        </p:spPr>
+        <p:txBody>
+          <a:bodyPr anchor="b"/>
+          <a:lstStyle/>
+          <a:p>
+            <a:pPr algn="r">
+              <a:defRPr sz="900">
+                <a:solidFill>
+                  <a:srgbClr val="9AA7B6"/>
+                </a:solidFill>
+                <a:latin typeface="Poppins"/>
+              </a:defRPr>
+            </a:pPr>
+            <a:r>
+              <a:rPr lang="fr-FR" sz="900">
+                <a:solidFill>
+                  <a:srgbClr val="9AA7B6"/>
+                </a:solidFill>
+                <a:latin typeface="Poppins"/>
+              </a:rPr>
+              <a:t>Université de Mostaganem — Dr. Madani BELACEL</a:t>
+            </a:r>
           </a:p>
         </p:txBody>
       </p:sp>
@@ -4076,9 +4145,7 @@
   <p:cSld>
     <p:bg>
       <p:bgPr>
-        <a:solidFill>
-          <a:srgbClr val="FFFFFF"/>
-        </a:solidFill>
+        <a:solidFill>val="FFFFFF"/&gt;</a:solidFill>
         <a:effectLst/>
       </p:bgPr>
     </p:bg>
@@ -4103,9 +4170,7 @@
           <a:prstGeom prst="rect">
             <a:avLst/>
           </a:prstGeom>
-          <a:solidFill>
-            <a:srgbClr val="2C6E49"/>
-          </a:solidFill>
+          <a:solidFill>val="00875B"/&gt;</a:solidFill>
           <a:ln>
             <a:noFill/>
           </a:ln>
@@ -4156,10 +4221,8 @@
           <a:p>
             <a:pPr algn="l">
               <a:defRPr sz="1000" b="0">
-                <a:solidFill>
-                  <a:srgbClr val="666666"/>
-                </a:solidFill>
-                <a:latin typeface="Calibri"/>
+                <a:solidFill>val="69788B"/&gt;</a:solidFill>
+                <a:latin typeface="Poppins"/>
               </a:defRPr>
             </a:pPr>
             <a:r>
@@ -4192,10 +4255,8 @@
           <a:p>
             <a:pPr algn="r">
               <a:defRPr sz="1000" b="0">
-                <a:solidFill>
-                  <a:srgbClr val="666666"/>
-                </a:solidFill>
-                <a:latin typeface="Calibri"/>
+                <a:solidFill>val="69788B"/&gt;</a:solidFill>
+                <a:latin typeface="Poppins"/>
               </a:defRPr>
             </a:pPr>
             <a:r>
@@ -4228,10 +4289,8 @@
           <a:p>
             <a:pPr algn="l">
               <a:defRPr sz="2400" b="1">
-                <a:solidFill>
-                  <a:srgbClr val="B45309"/>
-                </a:solidFill>
-                <a:latin typeface="Calibri"/>
+                <a:solidFill>val="F0B429"/&gt;</a:solidFill>
+                <a:latin typeface="Poppins"/>
               </a:defRPr>
             </a:pPr>
             <a:r>
@@ -4264,10 +4323,8 @@
           <a:p>
             <a:pPr algn="l">
               <a:defRPr sz="2200" b="0">
-                <a:solidFill>
-                  <a:srgbClr val="222222"/>
-                </a:solidFill>
-                <a:latin typeface="Calibri"/>
+                <a:solidFill>val="22344A"/&gt;</a:solidFill>
+                <a:latin typeface="Poppins"/>
               </a:defRPr>
             </a:pPr>
             <a:r>
@@ -4290,9 +4347,7 @@
           <a:prstGeom prst="rect">
             <a:avLst/>
           </a:prstGeom>
-          <a:solidFill>
-            <a:srgbClr val="E8F0E9"/>
-          </a:solidFill>
+          <a:solidFill>val="F4F6F8"/&gt;</a:solidFill>
           <a:ln>
             <a:noFill/>
           </a:ln>
@@ -4343,10 +4398,8 @@
           <a:p>
             <a:pPr algn="l">
               <a:defRPr sz="1100" b="1">
-                <a:solidFill>
-                  <a:srgbClr val="2C6E49"/>
-                </a:solidFill>
-                <a:latin typeface="Calibri"/>
+                <a:solidFill>val="00875B"/&gt;</a:solidFill>
+                <a:latin typeface="Poppins"/>
               </a:defRPr>
             </a:pPr>
             <a:r>
@@ -4379,10 +4432,8 @@
           <a:p>
             <a:pPr algn="r">
               <a:defRPr sz="2000" b="0">
-                <a:solidFill>
-                  <a:srgbClr val="1A3C6E"/>
-                </a:solidFill>
-                <a:latin typeface="Traditional Arabic"/>
+                <a:solidFill>val="34495E"/&gt;</a:solidFill>
+                <a:latin typeface="Poppins"/>
               </a:defRPr>
             </a:pPr>
             <a:r>
@@ -4415,10 +4466,8 @@
           <a:p>
             <a:pPr algn="l">
               <a:defRPr sz="900" b="0">
-                <a:solidFill>
-                  <a:srgbClr val="666666"/>
-                </a:solidFill>
-                <a:latin typeface="Calibri"/>
+                <a:solidFill>val="69788B"/&gt;</a:solidFill>
+                <a:latin typeface="Poppins"/>
               </a:defRPr>
             </a:pPr>
             <a:r>
@@ -4441,9 +4490,7 @@
           <a:prstGeom prst="rect">
             <a:avLst/>
           </a:prstGeom>
-          <a:solidFill>
-            <a:srgbClr val="1A5C33"/>
-          </a:solidFill>
+          <a:solidFill>val="006847"/&gt;</a:solidFill>
           <a:ln>
             <a:noFill/>
           </a:ln>
@@ -4467,6 +4514,47 @@
           <a:lstStyle/>
           <a:p>
             <a:pPr algn="ctr"/>
+          </a:p>
+        </p:txBody>
+      </p:sp>
+      <p:sp>
+        <p:nvSpPr>
+          <p:cNvPr id="990001" name="Pied de page FLE"/>
+          <p:cNvSpPr>
+            <a:spLocks noGrp="1"/>
+          </p:cNvSpPr>
+          <p:nvPr/>
+        </p:nvSpPr>
+        <p:spPr>
+          <a:xfrm>
+            <a:off x="4343400" y="-384048"/>
+            <a:ext cx="4572000" cy="274320"/>
+          </a:xfrm>
+          <a:prstGeom prst="rect">
+            <a:avLst/>
+          </a:prstGeom>
+        </p:spPr>
+        <p:txBody>
+          <a:bodyPr anchor="b"/>
+          <a:lstStyle/>
+          <a:p>
+            <a:pPr algn="r">
+              <a:defRPr sz="900">
+                <a:solidFill>
+                  <a:srgbClr val="9AA7B6"/>
+                </a:solidFill>
+                <a:latin typeface="Poppins"/>
+              </a:defRPr>
+            </a:pPr>
+            <a:r>
+              <a:rPr lang="fr-FR" sz="900">
+                <a:solidFill>
+                  <a:srgbClr val="9AA7B6"/>
+                </a:solidFill>
+                <a:latin typeface="Poppins"/>
+              </a:rPr>
+              <a:t>Université de Mostaganem — Dr. Madani BELACEL</a:t>
+            </a:r>
           </a:p>
         </p:txBody>
       </p:sp>
@@ -4483,9 +4571,7 @@
   <p:cSld>
     <p:bg>
       <p:bgPr>
-        <a:solidFill>
-          <a:srgbClr val="FFFFFF"/>
-        </a:solidFill>
+        <a:solidFill>val="FFFFFF"/&gt;</a:solidFill>
         <a:effectLst/>
       </p:bgPr>
     </p:bg>
@@ -4510,9 +4596,7 @@
           <a:prstGeom prst="rect">
             <a:avLst/>
           </a:prstGeom>
-          <a:solidFill>
-            <a:srgbClr val="2C6E49"/>
-          </a:solidFill>
+          <a:solidFill>val="00875B"/&gt;</a:solidFill>
           <a:ln>
             <a:noFill/>
           </a:ln>
@@ -4563,10 +4647,8 @@
           <a:p>
             <a:pPr algn="l">
               <a:defRPr sz="1000" b="0">
-                <a:solidFill>
-                  <a:srgbClr val="666666"/>
-                </a:solidFill>
-                <a:latin typeface="Calibri"/>
+                <a:solidFill>val="69788B"/&gt;</a:solidFill>
+                <a:latin typeface="Poppins"/>
               </a:defRPr>
             </a:pPr>
             <a:r>
@@ -4599,10 +4681,8 @@
           <a:p>
             <a:pPr algn="r">
               <a:defRPr sz="1000" b="0">
-                <a:solidFill>
-                  <a:srgbClr val="666666"/>
-                </a:solidFill>
-                <a:latin typeface="Calibri"/>
+                <a:solidFill>val="69788B"/&gt;</a:solidFill>
+                <a:latin typeface="Poppins"/>
               </a:defRPr>
             </a:pPr>
             <a:r>
@@ -4635,10 +4715,8 @@
           <a:p>
             <a:pPr algn="l">
               <a:defRPr sz="2400" b="1">
-                <a:solidFill>
-                  <a:srgbClr val="B45309"/>
-                </a:solidFill>
-                <a:latin typeface="Calibri"/>
+                <a:solidFill>val="F0B429"/&gt;</a:solidFill>
+                <a:latin typeface="Poppins"/>
               </a:defRPr>
             </a:pPr>
             <a:r>
@@ -4671,10 +4749,8 @@
           <a:p>
             <a:pPr algn="l">
               <a:defRPr sz="2200" b="0">
-                <a:solidFill>
-                  <a:srgbClr val="222222"/>
-                </a:solidFill>
-                <a:latin typeface="Calibri"/>
+                <a:solidFill>val="22344A"/&gt;</a:solidFill>
+                <a:latin typeface="Poppins"/>
               </a:defRPr>
             </a:pPr>
             <a:r>
@@ -4697,9 +4773,7 @@
           <a:prstGeom prst="rect">
             <a:avLst/>
           </a:prstGeom>
-          <a:solidFill>
-            <a:srgbClr val="E8F0E9"/>
-          </a:solidFill>
+          <a:solidFill>val="F4F6F8"/&gt;</a:solidFill>
           <a:ln>
             <a:noFill/>
           </a:ln>
@@ -4750,10 +4824,8 @@
           <a:p>
             <a:pPr algn="l">
               <a:defRPr sz="1100" b="1">
-                <a:solidFill>
-                  <a:srgbClr val="2C6E49"/>
-                </a:solidFill>
-                <a:latin typeface="Calibri"/>
+                <a:solidFill>val="00875B"/&gt;</a:solidFill>
+                <a:latin typeface="Poppins"/>
               </a:defRPr>
             </a:pPr>
             <a:r>
@@ -4786,10 +4858,8 @@
           <a:p>
             <a:pPr algn="r">
               <a:defRPr sz="2000" b="0">
-                <a:solidFill>
-                  <a:srgbClr val="1A3C6E"/>
-                </a:solidFill>
-                <a:latin typeface="Traditional Arabic"/>
+                <a:solidFill>val="34495E"/&gt;</a:solidFill>
+                <a:latin typeface="Poppins"/>
               </a:defRPr>
             </a:pPr>
             <a:r>
@@ -4822,10 +4892,8 @@
           <a:p>
             <a:pPr algn="l">
               <a:defRPr sz="900" b="0">
-                <a:solidFill>
-                  <a:srgbClr val="666666"/>
-                </a:solidFill>
-                <a:latin typeface="Calibri"/>
+                <a:solidFill>val="69788B"/&gt;</a:solidFill>
+                <a:latin typeface="Poppins"/>
               </a:defRPr>
             </a:pPr>
             <a:r>
@@ -4848,9 +4916,7 @@
           <a:prstGeom prst="rect">
             <a:avLst/>
           </a:prstGeom>
-          <a:solidFill>
-            <a:srgbClr val="1A5C33"/>
-          </a:solidFill>
+          <a:solidFill>val="006847"/&gt;</a:solidFill>
           <a:ln>
             <a:noFill/>
           </a:ln>
@@ -4874,6 +4940,47 @@
           <a:lstStyle/>
           <a:p>
             <a:pPr algn="ctr"/>
+          </a:p>
+        </p:txBody>
+      </p:sp>
+      <p:sp>
+        <p:nvSpPr>
+          <p:cNvPr id="990001" name="Pied de page FLE"/>
+          <p:cNvSpPr>
+            <a:spLocks noGrp="1"/>
+          </p:cNvSpPr>
+          <p:nvPr/>
+        </p:nvSpPr>
+        <p:spPr>
+          <a:xfrm>
+            <a:off x="4343400" y="-384048"/>
+            <a:ext cx="4572000" cy="274320"/>
+          </a:xfrm>
+          <a:prstGeom prst="rect">
+            <a:avLst/>
+          </a:prstGeom>
+        </p:spPr>
+        <p:txBody>
+          <a:bodyPr anchor="b"/>
+          <a:lstStyle/>
+          <a:p>
+            <a:pPr algn="r">
+              <a:defRPr sz="900">
+                <a:solidFill>
+                  <a:srgbClr val="9AA7B6"/>
+                </a:solidFill>
+                <a:latin typeface="Poppins"/>
+              </a:defRPr>
+            </a:pPr>
+            <a:r>
+              <a:rPr lang="fr-FR" sz="900">
+                <a:solidFill>
+                  <a:srgbClr val="9AA7B6"/>
+                </a:solidFill>
+                <a:latin typeface="Poppins"/>
+              </a:rPr>
+              <a:t>Université de Mostaganem — Dr. Madani BELACEL</a:t>
+            </a:r>
           </a:p>
         </p:txBody>
       </p:sp>
@@ -4890,9 +4997,7 @@
   <p:cSld>
     <p:bg>
       <p:bgPr>
-        <a:solidFill>
-          <a:srgbClr val="FFFFFF"/>
-        </a:solidFill>
+        <a:solidFill>val="FFFFFF"/&gt;</a:solidFill>
         <a:effectLst/>
       </p:bgPr>
     </p:bg>
@@ -4917,9 +5022,7 @@
           <a:prstGeom prst="rect">
             <a:avLst/>
           </a:prstGeom>
-          <a:solidFill>
-            <a:srgbClr val="2C6E49"/>
-          </a:solidFill>
+          <a:solidFill>val="00875B"/&gt;</a:solidFill>
           <a:ln>
             <a:noFill/>
           </a:ln>
@@ -4970,10 +5073,8 @@
           <a:p>
             <a:pPr algn="l">
               <a:defRPr sz="1000" b="0">
-                <a:solidFill>
-                  <a:srgbClr val="666666"/>
-                </a:solidFill>
-                <a:latin typeface="Calibri"/>
+                <a:solidFill>val="69788B"/&gt;</a:solidFill>
+                <a:latin typeface="Poppins"/>
               </a:defRPr>
             </a:pPr>
             <a:r>
@@ -5006,10 +5107,8 @@
           <a:p>
             <a:pPr algn="r">
               <a:defRPr sz="1000" b="0">
-                <a:solidFill>
-                  <a:srgbClr val="666666"/>
-                </a:solidFill>
-                <a:latin typeface="Calibri"/>
+                <a:solidFill>val="69788B"/&gt;</a:solidFill>
+                <a:latin typeface="Poppins"/>
               </a:defRPr>
             </a:pPr>
             <a:r>
@@ -5042,10 +5141,8 @@
           <a:p>
             <a:pPr algn="l">
               <a:defRPr sz="2400" b="1">
-                <a:solidFill>
-                  <a:srgbClr val="B45309"/>
-                </a:solidFill>
-                <a:latin typeface="Calibri"/>
+                <a:solidFill>val="F0B429"/&gt;</a:solidFill>
+                <a:latin typeface="Poppins"/>
               </a:defRPr>
             </a:pPr>
             <a:r>
@@ -5078,10 +5175,8 @@
           <a:p>
             <a:pPr algn="l">
               <a:defRPr sz="2200" b="0">
-                <a:solidFill>
-                  <a:srgbClr val="222222"/>
-                </a:solidFill>
-                <a:latin typeface="Calibri"/>
+                <a:solidFill>val="22344A"/&gt;</a:solidFill>
+                <a:latin typeface="Poppins"/>
               </a:defRPr>
             </a:pPr>
             <a:r>
@@ -5104,9 +5199,7 @@
           <a:prstGeom prst="rect">
             <a:avLst/>
           </a:prstGeom>
-          <a:solidFill>
-            <a:srgbClr val="E8F0E9"/>
-          </a:solidFill>
+          <a:solidFill>val="F4F6F8"/&gt;</a:solidFill>
           <a:ln>
             <a:noFill/>
           </a:ln>
@@ -5157,10 +5250,8 @@
           <a:p>
             <a:pPr algn="l">
               <a:defRPr sz="1100" b="1">
-                <a:solidFill>
-                  <a:srgbClr val="2C6E49"/>
-                </a:solidFill>
-                <a:latin typeface="Calibri"/>
+                <a:solidFill>val="00875B"/&gt;</a:solidFill>
+                <a:latin typeface="Poppins"/>
               </a:defRPr>
             </a:pPr>
             <a:r>
@@ -5193,10 +5284,8 @@
           <a:p>
             <a:pPr algn="r">
               <a:defRPr sz="2000" b="0">
-                <a:solidFill>
-                  <a:srgbClr val="1A3C6E"/>
-                </a:solidFill>
-                <a:latin typeface="Traditional Arabic"/>
+                <a:solidFill>val="34495E"/&gt;</a:solidFill>
+                <a:latin typeface="Poppins"/>
               </a:defRPr>
             </a:pPr>
             <a:r>
@@ -5229,10 +5318,8 @@
           <a:p>
             <a:pPr algn="l">
               <a:defRPr sz="900" b="0">
-                <a:solidFill>
-                  <a:srgbClr val="666666"/>
-                </a:solidFill>
-                <a:latin typeface="Calibri"/>
+                <a:solidFill>val="69788B"/&gt;</a:solidFill>
+                <a:latin typeface="Poppins"/>
               </a:defRPr>
             </a:pPr>
             <a:r>
@@ -5255,9 +5342,7 @@
           <a:prstGeom prst="rect">
             <a:avLst/>
           </a:prstGeom>
-          <a:solidFill>
-            <a:srgbClr val="1A5C33"/>
-          </a:solidFill>
+          <a:solidFill>val="006847"/&gt;</a:solidFill>
           <a:ln>
             <a:noFill/>
           </a:ln>
@@ -5281,6 +5366,47 @@
           <a:lstStyle/>
           <a:p>
             <a:pPr algn="ctr"/>
+          </a:p>
+        </p:txBody>
+      </p:sp>
+      <p:sp>
+        <p:nvSpPr>
+          <p:cNvPr id="990001" name="Pied de page FLE"/>
+          <p:cNvSpPr>
+            <a:spLocks noGrp="1"/>
+          </p:cNvSpPr>
+          <p:nvPr/>
+        </p:nvSpPr>
+        <p:spPr>
+          <a:xfrm>
+            <a:off x="4343400" y="-384048"/>
+            <a:ext cx="4572000" cy="274320"/>
+          </a:xfrm>
+          <a:prstGeom prst="rect">
+            <a:avLst/>
+          </a:prstGeom>
+        </p:spPr>
+        <p:txBody>
+          <a:bodyPr anchor="b"/>
+          <a:lstStyle/>
+          <a:p>
+            <a:pPr algn="r">
+              <a:defRPr sz="900">
+                <a:solidFill>
+                  <a:srgbClr val="9AA7B6"/>
+                </a:solidFill>
+                <a:latin typeface="Poppins"/>
+              </a:defRPr>
+            </a:pPr>
+            <a:r>
+              <a:rPr lang="fr-FR" sz="900">
+                <a:solidFill>
+                  <a:srgbClr val="9AA7B6"/>
+                </a:solidFill>
+                <a:latin typeface="Poppins"/>
+              </a:rPr>
+              <a:t>Université de Mostaganem — Dr. Madani BELACEL</a:t>
+            </a:r>
           </a:p>
         </p:txBody>
       </p:sp>
@@ -5297,9 +5423,7 @@
   <p:cSld>
     <p:bg>
       <p:bgPr>
-        <a:solidFill>
-          <a:srgbClr val="FFFFFF"/>
-        </a:solidFill>
+        <a:solidFill>val="FFFFFF"/&gt;</a:solidFill>
         <a:effectLst/>
       </p:bgPr>
     </p:bg>
@@ -5324,9 +5448,7 @@
           <a:prstGeom prst="rect">
             <a:avLst/>
           </a:prstGeom>
-          <a:solidFill>
-            <a:srgbClr val="2C6E49"/>
-          </a:solidFill>
+          <a:solidFill>val="00875B"/&gt;</a:solidFill>
           <a:ln>
             <a:noFill/>
           </a:ln>
@@ -5377,10 +5499,8 @@
           <a:p>
             <a:pPr algn="l">
               <a:defRPr sz="1000" b="0">
-                <a:solidFill>
-                  <a:srgbClr val="666666"/>
-                </a:solidFill>
-                <a:latin typeface="Calibri"/>
+                <a:solidFill>val="69788B"/&gt;</a:solidFill>
+                <a:latin typeface="Poppins"/>
               </a:defRPr>
             </a:pPr>
             <a:r>
@@ -5413,10 +5533,8 @@
           <a:p>
             <a:pPr algn="r">
               <a:defRPr sz="1000" b="0">
-                <a:solidFill>
-                  <a:srgbClr val="666666"/>
-                </a:solidFill>
-                <a:latin typeface="Calibri"/>
+                <a:solidFill>val="69788B"/&gt;</a:solidFill>
+                <a:latin typeface="Poppins"/>
               </a:defRPr>
             </a:pPr>
             <a:r>
@@ -5449,10 +5567,8 @@
           <a:p>
             <a:pPr algn="l">
               <a:defRPr sz="2400" b="1">
-                <a:solidFill>
-                  <a:srgbClr val="B45309"/>
-                </a:solidFill>
-                <a:latin typeface="Calibri"/>
+                <a:solidFill>val="F0B429"/&gt;</a:solidFill>
+                <a:latin typeface="Poppins"/>
               </a:defRPr>
             </a:pPr>
             <a:r>
@@ -5485,10 +5601,8 @@
           <a:p>
             <a:pPr algn="l">
               <a:defRPr sz="2200" b="0">
-                <a:solidFill>
-                  <a:srgbClr val="222222"/>
-                </a:solidFill>
-                <a:latin typeface="Calibri"/>
+                <a:solidFill>val="22344A"/&gt;</a:solidFill>
+                <a:latin typeface="Poppins"/>
               </a:defRPr>
             </a:pPr>
             <a:r>
@@ -5511,9 +5625,7 @@
           <a:prstGeom prst="rect">
             <a:avLst/>
           </a:prstGeom>
-          <a:solidFill>
-            <a:srgbClr val="E8F0E9"/>
-          </a:solidFill>
+          <a:solidFill>val="F4F6F8"/&gt;</a:solidFill>
           <a:ln>
             <a:noFill/>
           </a:ln>
@@ -5564,10 +5676,8 @@
           <a:p>
             <a:pPr algn="l">
               <a:defRPr sz="1100" b="1">
-                <a:solidFill>
-                  <a:srgbClr val="2C6E49"/>
-                </a:solidFill>
-                <a:latin typeface="Calibri"/>
+                <a:solidFill>val="00875B"/&gt;</a:solidFill>
+                <a:latin typeface="Poppins"/>
               </a:defRPr>
             </a:pPr>
             <a:r>
@@ -5600,10 +5710,8 @@
           <a:p>
             <a:pPr algn="r">
               <a:defRPr sz="2000" b="0">
-                <a:solidFill>
-                  <a:srgbClr val="1A3C6E"/>
-                </a:solidFill>
-                <a:latin typeface="Traditional Arabic"/>
+                <a:solidFill>val="34495E"/&gt;</a:solidFill>
+                <a:latin typeface="Poppins"/>
               </a:defRPr>
             </a:pPr>
             <a:r>
@@ -5636,10 +5744,8 @@
           <a:p>
             <a:pPr algn="l">
               <a:defRPr sz="900" b="0">
-                <a:solidFill>
-                  <a:srgbClr val="666666"/>
-                </a:solidFill>
-                <a:latin typeface="Calibri"/>
+                <a:solidFill>val="69788B"/&gt;</a:solidFill>
+                <a:latin typeface="Poppins"/>
               </a:defRPr>
             </a:pPr>
             <a:r>
@@ -5662,9 +5768,7 @@
           <a:prstGeom prst="rect">
             <a:avLst/>
           </a:prstGeom>
-          <a:solidFill>
-            <a:srgbClr val="1A5C33"/>
-          </a:solidFill>
+          <a:solidFill>val="006847"/&gt;</a:solidFill>
           <a:ln>
             <a:noFill/>
           </a:ln>
@@ -5688,6 +5792,47 @@
           <a:lstStyle/>
           <a:p>
             <a:pPr algn="ctr"/>
+          </a:p>
+        </p:txBody>
+      </p:sp>
+      <p:sp>
+        <p:nvSpPr>
+          <p:cNvPr id="990001" name="Pied de page FLE"/>
+          <p:cNvSpPr>
+            <a:spLocks noGrp="1"/>
+          </p:cNvSpPr>
+          <p:nvPr/>
+        </p:nvSpPr>
+        <p:spPr>
+          <a:xfrm>
+            <a:off x="4343400" y="-384048"/>
+            <a:ext cx="4572000" cy="274320"/>
+          </a:xfrm>
+          <a:prstGeom prst="rect">
+            <a:avLst/>
+          </a:prstGeom>
+        </p:spPr>
+        <p:txBody>
+          <a:bodyPr anchor="b"/>
+          <a:lstStyle/>
+          <a:p>
+            <a:pPr algn="r">
+              <a:defRPr sz="900">
+                <a:solidFill>
+                  <a:srgbClr val="9AA7B6"/>
+                </a:solidFill>
+                <a:latin typeface="Poppins"/>
+              </a:defRPr>
+            </a:pPr>
+            <a:r>
+              <a:rPr lang="fr-FR" sz="900">
+                <a:solidFill>
+                  <a:srgbClr val="9AA7B6"/>
+                </a:solidFill>
+                <a:latin typeface="Poppins"/>
+              </a:rPr>
+              <a:t>Université de Mostaganem — Dr. Madani BELACEL</a:t>
+            </a:r>
           </a:p>
         </p:txBody>
       </p:sp>
@@ -5704,9 +5849,7 @@
   <p:cSld>
     <p:bg>
       <p:bgPr>
-        <a:solidFill>
-          <a:srgbClr val="FFFFFF"/>
-        </a:solidFill>
+        <a:solidFill>val="FFFFFF"/&gt;</a:solidFill>
         <a:effectLst/>
       </p:bgPr>
     </p:bg>
@@ -5731,9 +5874,7 @@
           <a:prstGeom prst="rect">
             <a:avLst/>
           </a:prstGeom>
-          <a:solidFill>
-            <a:srgbClr val="2C6E49"/>
-          </a:solidFill>
+          <a:solidFill>val="00875B"/&gt;</a:solidFill>
           <a:ln>
             <a:noFill/>
           </a:ln>
@@ -5784,10 +5925,8 @@
           <a:p>
             <a:pPr algn="l">
               <a:defRPr sz="1000" b="0">
-                <a:solidFill>
-                  <a:srgbClr val="666666"/>
-                </a:solidFill>
-                <a:latin typeface="Calibri"/>
+                <a:solidFill>val="69788B"/&gt;</a:solidFill>
+                <a:latin typeface="Poppins"/>
               </a:defRPr>
             </a:pPr>
             <a:r>
@@ -5820,10 +5959,8 @@
           <a:p>
             <a:pPr algn="r">
               <a:defRPr sz="1000" b="0">
-                <a:solidFill>
-                  <a:srgbClr val="666666"/>
-                </a:solidFill>
-                <a:latin typeface="Calibri"/>
+                <a:solidFill>val="69788B"/&gt;</a:solidFill>
+                <a:latin typeface="Poppins"/>
               </a:defRPr>
             </a:pPr>
             <a:r>
@@ -5856,10 +5993,8 @@
           <a:p>
             <a:pPr algn="l">
               <a:defRPr sz="2400" b="1">
-                <a:solidFill>
-                  <a:srgbClr val="B45309"/>
-                </a:solidFill>
-                <a:latin typeface="Calibri"/>
+                <a:solidFill>val="F0B429"/&gt;</a:solidFill>
+                <a:latin typeface="Poppins"/>
               </a:defRPr>
             </a:pPr>
             <a:r>
@@ -5892,10 +6027,8 @@
           <a:p>
             <a:pPr algn="l">
               <a:defRPr sz="2200" b="0">
-                <a:solidFill>
-                  <a:srgbClr val="222222"/>
-                </a:solidFill>
-                <a:latin typeface="Calibri"/>
+                <a:solidFill>val="22344A"/&gt;</a:solidFill>
+                <a:latin typeface="Poppins"/>
               </a:defRPr>
             </a:pPr>
             <a:r>
@@ -5918,9 +6051,7 @@
           <a:prstGeom prst="rect">
             <a:avLst/>
           </a:prstGeom>
-          <a:solidFill>
-            <a:srgbClr val="E8F0E9"/>
-          </a:solidFill>
+          <a:solidFill>val="F4F6F8"/&gt;</a:solidFill>
           <a:ln>
             <a:noFill/>
           </a:ln>
@@ -5971,10 +6102,8 @@
           <a:p>
             <a:pPr algn="l">
               <a:defRPr sz="1100" b="1">
-                <a:solidFill>
-                  <a:srgbClr val="2C6E49"/>
-                </a:solidFill>
-                <a:latin typeface="Calibri"/>
+                <a:solidFill>val="00875B"/&gt;</a:solidFill>
+                <a:latin typeface="Poppins"/>
               </a:defRPr>
             </a:pPr>
             <a:r>
@@ -6007,10 +6136,8 @@
           <a:p>
             <a:pPr algn="r">
               <a:defRPr sz="2000" b="0">
-                <a:solidFill>
-                  <a:srgbClr val="1A3C6E"/>
-                </a:solidFill>
-                <a:latin typeface="Traditional Arabic"/>
+                <a:solidFill>val="34495E"/&gt;</a:solidFill>
+                <a:latin typeface="Poppins"/>
               </a:defRPr>
             </a:pPr>
             <a:r>
@@ -6043,10 +6170,8 @@
           <a:p>
             <a:pPr algn="l">
               <a:defRPr sz="900" b="0">
-                <a:solidFill>
-                  <a:srgbClr val="666666"/>
-                </a:solidFill>
-                <a:latin typeface="Calibri"/>
+                <a:solidFill>val="69788B"/&gt;</a:solidFill>
+                <a:latin typeface="Poppins"/>
               </a:defRPr>
             </a:pPr>
             <a:r>
@@ -6069,9 +6194,7 @@
           <a:prstGeom prst="rect">
             <a:avLst/>
           </a:prstGeom>
-          <a:solidFill>
-            <a:srgbClr val="1A5C33"/>
-          </a:solidFill>
+          <a:solidFill>val="006847"/&gt;</a:solidFill>
           <a:ln>
             <a:noFill/>
           </a:ln>
@@ -6095,6 +6218,47 @@
           <a:lstStyle/>
           <a:p>
             <a:pPr algn="ctr"/>
+          </a:p>
+        </p:txBody>
+      </p:sp>
+      <p:sp>
+        <p:nvSpPr>
+          <p:cNvPr id="990001" name="Pied de page FLE"/>
+          <p:cNvSpPr>
+            <a:spLocks noGrp="1"/>
+          </p:cNvSpPr>
+          <p:nvPr/>
+        </p:nvSpPr>
+        <p:spPr>
+          <a:xfrm>
+            <a:off x="4343400" y="-384048"/>
+            <a:ext cx="4572000" cy="274320"/>
+          </a:xfrm>
+          <a:prstGeom prst="rect">
+            <a:avLst/>
+          </a:prstGeom>
+        </p:spPr>
+        <p:txBody>
+          <a:bodyPr anchor="b"/>
+          <a:lstStyle/>
+          <a:p>
+            <a:pPr algn="r">
+              <a:defRPr sz="900">
+                <a:solidFill>
+                  <a:srgbClr val="9AA7B6"/>
+                </a:solidFill>
+                <a:latin typeface="Poppins"/>
+              </a:defRPr>
+            </a:pPr>
+            <a:r>
+              <a:rPr lang="fr-FR" sz="900">
+                <a:solidFill>
+                  <a:srgbClr val="9AA7B6"/>
+                </a:solidFill>
+                <a:latin typeface="Poppins"/>
+              </a:rPr>
+              <a:t>Université de Mostaganem — Dr. Madani BELACEL</a:t>
+            </a:r>
           </a:p>
         </p:txBody>
       </p:sp>
@@ -6111,9 +6275,7 @@
   <p:cSld>
     <p:bg>
       <p:bgPr>
-        <a:solidFill>
-          <a:srgbClr val="FFFFFF"/>
-        </a:solidFill>
+        <a:solidFill>val="FFFFFF"/&gt;</a:solidFill>
         <a:effectLst/>
       </p:bgPr>
     </p:bg>
@@ -6138,9 +6300,7 @@
           <a:prstGeom prst="rect">
             <a:avLst/>
           </a:prstGeom>
-          <a:solidFill>
-            <a:srgbClr val="2C6E49"/>
-          </a:solidFill>
+          <a:solidFill>val="00875B"/&gt;</a:solidFill>
           <a:ln>
             <a:noFill/>
           </a:ln>
@@ -6191,10 +6351,8 @@
           <a:p>
             <a:pPr algn="l">
               <a:defRPr sz="1000" b="0">
-                <a:solidFill>
-                  <a:srgbClr val="666666"/>
-                </a:solidFill>
-                <a:latin typeface="Calibri"/>
+                <a:solidFill>val="69788B"/&gt;</a:solidFill>
+                <a:latin typeface="Poppins"/>
               </a:defRPr>
             </a:pPr>
             <a:r>
@@ -6227,10 +6385,8 @@
           <a:p>
             <a:pPr algn="r">
               <a:defRPr sz="1000" b="0">
-                <a:solidFill>
-                  <a:srgbClr val="666666"/>
-                </a:solidFill>
-                <a:latin typeface="Calibri"/>
+                <a:solidFill>val="69788B"/&gt;</a:solidFill>
+                <a:latin typeface="Poppins"/>
               </a:defRPr>
             </a:pPr>
             <a:r>
@@ -6263,10 +6419,8 @@
           <a:p>
             <a:pPr algn="l">
               <a:defRPr sz="2400" b="1">
-                <a:solidFill>
-                  <a:srgbClr val="B45309"/>
-                </a:solidFill>
-                <a:latin typeface="Calibri"/>
+                <a:solidFill>val="F0B429"/&gt;</a:solidFill>
+                <a:latin typeface="Poppins"/>
               </a:defRPr>
             </a:pPr>
             <a:r>
@@ -6299,10 +6453,8 @@
           <a:p>
             <a:pPr algn="l">
               <a:defRPr sz="2200" b="0">
-                <a:solidFill>
-                  <a:srgbClr val="222222"/>
-                </a:solidFill>
-                <a:latin typeface="Calibri"/>
+                <a:solidFill>val="22344A"/&gt;</a:solidFill>
+                <a:latin typeface="Poppins"/>
               </a:defRPr>
             </a:pPr>
             <a:r>
@@ -6325,9 +6477,7 @@
           <a:prstGeom prst="rect">
             <a:avLst/>
           </a:prstGeom>
-          <a:solidFill>
-            <a:srgbClr val="E8F0E9"/>
-          </a:solidFill>
+          <a:solidFill>val="F4F6F8"/&gt;</a:solidFill>
           <a:ln>
             <a:noFill/>
           </a:ln>
@@ -6378,10 +6528,8 @@
           <a:p>
             <a:pPr algn="l">
               <a:defRPr sz="1100" b="1">
-                <a:solidFill>
-                  <a:srgbClr val="2C6E49"/>
-                </a:solidFill>
-                <a:latin typeface="Calibri"/>
+                <a:solidFill>val="00875B"/&gt;</a:solidFill>
+                <a:latin typeface="Poppins"/>
               </a:defRPr>
             </a:pPr>
             <a:r>
@@ -6414,10 +6562,8 @@
           <a:p>
             <a:pPr algn="r">
               <a:defRPr sz="2000" b="0">
-                <a:solidFill>
-                  <a:srgbClr val="1A3C6E"/>
-                </a:solidFill>
-                <a:latin typeface="Traditional Arabic"/>
+                <a:solidFill>val="34495E"/&gt;</a:solidFill>
+                <a:latin typeface="Poppins"/>
               </a:defRPr>
             </a:pPr>
             <a:r>
@@ -6450,10 +6596,8 @@
           <a:p>
             <a:pPr algn="l">
               <a:defRPr sz="900" b="0">
-                <a:solidFill>
-                  <a:srgbClr val="666666"/>
-                </a:solidFill>
-                <a:latin typeface="Calibri"/>
+                <a:solidFill>val="69788B"/&gt;</a:solidFill>
+                <a:latin typeface="Poppins"/>
               </a:defRPr>
             </a:pPr>
             <a:r>
@@ -6476,9 +6620,7 @@
           <a:prstGeom prst="rect">
             <a:avLst/>
           </a:prstGeom>
-          <a:solidFill>
-            <a:srgbClr val="1A5C33"/>
-          </a:solidFill>
+          <a:solidFill>val="006847"/&gt;</a:solidFill>
           <a:ln>
             <a:noFill/>
           </a:ln>
@@ -6502,6 +6644,47 @@
           <a:lstStyle/>
           <a:p>
             <a:pPr algn="ctr"/>
+          </a:p>
+        </p:txBody>
+      </p:sp>
+      <p:sp>
+        <p:nvSpPr>
+          <p:cNvPr id="990001" name="Pied de page FLE"/>
+          <p:cNvSpPr>
+            <a:spLocks noGrp="1"/>
+          </p:cNvSpPr>
+          <p:nvPr/>
+        </p:nvSpPr>
+        <p:spPr>
+          <a:xfrm>
+            <a:off x="4343400" y="-384048"/>
+            <a:ext cx="4572000" cy="274320"/>
+          </a:xfrm>
+          <a:prstGeom prst="rect">
+            <a:avLst/>
+          </a:prstGeom>
+        </p:spPr>
+        <p:txBody>
+          <a:bodyPr anchor="b"/>
+          <a:lstStyle/>
+          <a:p>
+            <a:pPr algn="r">
+              <a:defRPr sz="900">
+                <a:solidFill>
+                  <a:srgbClr val="9AA7B6"/>
+                </a:solidFill>
+                <a:latin typeface="Poppins"/>
+              </a:defRPr>
+            </a:pPr>
+            <a:r>
+              <a:rPr lang="fr-FR" sz="900">
+                <a:solidFill>
+                  <a:srgbClr val="9AA7B6"/>
+                </a:solidFill>
+                <a:latin typeface="Poppins"/>
+              </a:rPr>
+              <a:t>Université de Mostaganem — Dr. Madani BELACEL</a:t>
+            </a:r>
           </a:p>
         </p:txBody>
       </p:sp>
@@ -6518,9 +6701,7 @@
   <p:cSld>
     <p:bg>
       <p:bgPr>
-        <a:solidFill>
-          <a:srgbClr val="FFFFFF"/>
-        </a:solidFill>
+        <a:solidFill>val="FFFFFF"/&gt;</a:solidFill>
         <a:effectLst/>
       </p:bgPr>
     </p:bg>
@@ -6545,9 +6726,7 @@
           <a:prstGeom prst="rect">
             <a:avLst/>
           </a:prstGeom>
-          <a:solidFill>
-            <a:srgbClr val="2C6E49"/>
-          </a:solidFill>
+          <a:solidFill>val="00875B"/&gt;</a:solidFill>
           <a:ln>
             <a:noFill/>
           </a:ln>
@@ -6598,10 +6777,8 @@
           <a:p>
             <a:pPr algn="l">
               <a:defRPr sz="1000" b="0">
-                <a:solidFill>
-                  <a:srgbClr val="666666"/>
-                </a:solidFill>
-                <a:latin typeface="Calibri"/>
+                <a:solidFill>val="69788B"/&gt;</a:solidFill>
+                <a:latin typeface="Poppins"/>
               </a:defRPr>
             </a:pPr>
             <a:r>
@@ -6634,10 +6811,8 @@
           <a:p>
             <a:pPr algn="r">
               <a:defRPr sz="1000" b="0">
-                <a:solidFill>
-                  <a:srgbClr val="666666"/>
-                </a:solidFill>
-                <a:latin typeface="Calibri"/>
+                <a:solidFill>val="69788B"/&gt;</a:solidFill>
+                <a:latin typeface="Poppins"/>
               </a:defRPr>
             </a:pPr>
             <a:r>
@@ -6670,10 +6845,8 @@
           <a:p>
             <a:pPr algn="l">
               <a:defRPr sz="2400" b="1">
-                <a:solidFill>
-                  <a:srgbClr val="B45309"/>
-                </a:solidFill>
-                <a:latin typeface="Calibri"/>
+                <a:solidFill>val="F0B429"/&gt;</a:solidFill>
+                <a:latin typeface="Poppins"/>
               </a:defRPr>
             </a:pPr>
             <a:r>
@@ -6706,10 +6879,8 @@
           <a:p>
             <a:pPr algn="l">
               <a:defRPr sz="2200" b="0">
-                <a:solidFill>
-                  <a:srgbClr val="222222"/>
-                </a:solidFill>
-                <a:latin typeface="Calibri"/>
+                <a:solidFill>val="22344A"/&gt;</a:solidFill>
+                <a:latin typeface="Poppins"/>
               </a:defRPr>
             </a:pPr>
             <a:r>
@@ -6732,9 +6903,7 @@
           <a:prstGeom prst="rect">
             <a:avLst/>
           </a:prstGeom>
-          <a:solidFill>
-            <a:srgbClr val="E8F0E9"/>
-          </a:solidFill>
+          <a:solidFill>val="F4F6F8"/&gt;</a:solidFill>
           <a:ln>
             <a:noFill/>
           </a:ln>
@@ -6785,10 +6954,8 @@
           <a:p>
             <a:pPr algn="l">
               <a:defRPr sz="1100" b="1">
-                <a:solidFill>
-                  <a:srgbClr val="2C6E49"/>
-                </a:solidFill>
-                <a:latin typeface="Calibri"/>
+                <a:solidFill>val="00875B"/&gt;</a:solidFill>
+                <a:latin typeface="Poppins"/>
               </a:defRPr>
             </a:pPr>
             <a:r>
@@ -6821,10 +6988,8 @@
           <a:p>
             <a:pPr algn="r">
               <a:defRPr sz="2000" b="0">
-                <a:solidFill>
-                  <a:srgbClr val="1A3C6E"/>
-                </a:solidFill>
-                <a:latin typeface="Traditional Arabic"/>
+                <a:solidFill>val="34495E"/&gt;</a:solidFill>
+                <a:latin typeface="Poppins"/>
               </a:defRPr>
             </a:pPr>
             <a:r>
@@ -6857,10 +7022,8 @@
           <a:p>
             <a:pPr algn="l">
               <a:defRPr sz="900" b="0">
-                <a:solidFill>
-                  <a:srgbClr val="666666"/>
-                </a:solidFill>
-                <a:latin typeface="Calibri"/>
+                <a:solidFill>val="69788B"/&gt;</a:solidFill>
+                <a:latin typeface="Poppins"/>
               </a:defRPr>
             </a:pPr>
             <a:r>
@@ -6883,9 +7046,7 @@
           <a:prstGeom prst="rect">
             <a:avLst/>
           </a:prstGeom>
-          <a:solidFill>
-            <a:srgbClr val="1A5C33"/>
-          </a:solidFill>
+          <a:solidFill>val="006847"/&gt;</a:solidFill>
           <a:ln>
             <a:noFill/>
           </a:ln>
@@ -6909,6 +7070,47 @@
           <a:lstStyle/>
           <a:p>
             <a:pPr algn="ctr"/>
+          </a:p>
+        </p:txBody>
+      </p:sp>
+      <p:sp>
+        <p:nvSpPr>
+          <p:cNvPr id="990001" name="Pied de page FLE"/>
+          <p:cNvSpPr>
+            <a:spLocks noGrp="1"/>
+          </p:cNvSpPr>
+          <p:nvPr/>
+        </p:nvSpPr>
+        <p:spPr>
+          <a:xfrm>
+            <a:off x="4343400" y="-384048"/>
+            <a:ext cx="4572000" cy="274320"/>
+          </a:xfrm>
+          <a:prstGeom prst="rect">
+            <a:avLst/>
+          </a:prstGeom>
+        </p:spPr>
+        <p:txBody>
+          <a:bodyPr anchor="b"/>
+          <a:lstStyle/>
+          <a:p>
+            <a:pPr algn="r">
+              <a:defRPr sz="900">
+                <a:solidFill>
+                  <a:srgbClr val="9AA7B6"/>
+                </a:solidFill>
+                <a:latin typeface="Poppins"/>
+              </a:defRPr>
+            </a:pPr>
+            <a:r>
+              <a:rPr lang="fr-FR" sz="900">
+                <a:solidFill>
+                  <a:srgbClr val="9AA7B6"/>
+                </a:solidFill>
+                <a:latin typeface="Poppins"/>
+              </a:rPr>
+              <a:t>Université de Mostaganem — Dr. Madani BELACEL</a:t>
+            </a:r>
           </a:p>
         </p:txBody>
       </p:sp>
@@ -6963,7 +7165,7 @@
     </a:clrScheme>
     <a:fontScheme name="Office">
       <a:majorFont>
-        <a:latin typeface="Calibri"/>
+        <a:latin typeface="Poppins"/>
         <a:ea typeface=""/>
         <a:cs typeface=""/>
         <a:font script="Jpan" typeface="ＭＳ Ｐゴシック"/>
@@ -6998,7 +7200,7 @@
         <a:font script="Geor" typeface="Sylfaen"/>
       </a:majorFont>
       <a:minorFont>
-        <a:latin typeface="Calibri"/>
+        <a:latin typeface="Poppins"/>
         <a:ea typeface=""/>
         <a:cs typeface=""/>
         <a:font script="Jpan" typeface="ＭＳ Ｐゴシック"/>
